--- a/decks/englit-inspector/englit-inspector_ch6_themes-and-essay.pptx
+++ b/decks/englit-inspector/englit-inspector_ch6_themes-and-essay.pptx
@@ -126,29 +126,29 @@
   <p:extLst>
     <p:ext uri="{521415D9-36F7-43E2-AB2F-B90AF26B5E84}">
       <p14:sectionLst xmlns:p14="http://schemas.microsoft.com/office/powerpoint/2010/main">
-        <p14:section name="Opening" id="{48e20c97-db9b-a1a3-f4d2-d3dc841c591a}">
+        <p14:section name="Opening" id="{2b346a98-2487-eb80-89fb-72d957d9a0d6}">
           <p14:sldIdLst>
             <p14:sldId id="256"/>
           </p14:sldIdLst>
         </p14:section>
-        <p14:section name="Gate" id="{bd62d25b-2941-e451-28c6-e05dedac86b9}">
+        <p14:section name="Gate" id="{442fb349-302b-a8cb-de0c-d4382f5c4a66}">
           <p14:sldIdLst>
             <p14:sldId id="257"/>
             <p14:sldId id="258"/>
           </p14:sldIdLst>
         </p14:section>
-        <p14:section name="Pre-teach" id="{20bbae35-93d4-4c9a-cd7b-c31a7e46519e}">
+        <p14:section name="Pre-teach" id="{823fc006-d5a2-43dc-b4ad-5deea56a5157}">
           <p14:sldIdLst>
             <p14:sldId id="259"/>
           </p14:sldIdLst>
         </p14:section>
-        <p14:section name="Read-along" id="{354a455e-8041-58a3-897c-9bf29c363937}">
+        <p14:section name="Read-along" id="{99a1bc54-b4d0-5dfa-a3cc-4884b1e4a92c}">
           <p14:sldIdLst>
             <p14:sldId id="260"/>
             <p14:sldId id="261"/>
           </p14:sldIdLst>
         </p14:section>
-        <p14:section name="Teach" id="{534c1e2b-e786-5e83-d24f-f91eea8ee2a9}">
+        <p14:section name="Teach" id="{e3a6b49f-2a6d-6368-9da7-4259305d4008}">
           <p14:sldIdLst>
             <p14:sldId id="262"/>
             <p14:sldId id="263"/>
@@ -156,7 +156,7 @@
             <p14:sldId id="265"/>
           </p14:sldIdLst>
         </p14:section>
-        <p14:section name="Routes" id="{0de625cc-7298-14e5-7770-7ed1f2b4b779}">
+        <p14:section name="Routes" id="{3811ce51-8113-8dc5-9731-4abc7654f8aa}">
           <p14:sldIdLst>
             <p14:sldId id="266"/>
             <p14:sldId id="267"/>
@@ -165,12 +165,12 @@
             <p14:sldId id="270"/>
           </p14:sldIdLst>
         </p14:section>
-        <p14:section name="Close" id="{a4760970-01c1-b62d-fb0a-fb2064c7f1a5}">
+        <p14:section name="Close" id="{afcc2714-3578-47c7-6f28-121ceb3bbb8d}">
           <p14:sldIdLst>
             <p14:sldId id="271"/>
           </p14:sldIdLst>
         </p14:section>
-        <p14:section name="Answers" id="{3e0b8f12-6ea9-8d8b-ebe1-70919038a4f8}">
+        <p14:section name="Answers" id="{51697bc0-7d3f-0063-42e4-ee0ad3ead6d1}">
           <p14:sldIdLst>
             <p14:sldId id="272"/>
             <p14:sldId id="273"/>
@@ -1236,7 +1236,7 @@
               <a:rPr lang="en-US" dirty="0"/>
               <a:t>Exit ticket — individual, silent, on a slip or mini-whiteboard. Recall before help: no notes, no lanes, no hints. Collect before pupils leave.
 Question: Which assessment objective rewards analysis of Priestley's methods, such as dramatic irony, stage directions and structure?
-Answer: A   AO2. AO2 is analysis of language, form and structure, using subject terminology. Methods are AO2; context is AO3; argument and evidence are AO1; accuracy is AO4.
+Answer: C   AO2. AO2 is analysis of language, form and structure, using subject terminology. Methods are AO2; context is AO3; argument and evidence are AO1; accuracy is AO4.
 Source of this question: gate item 1 re-asked (options rotated) — this chapter has no third quick-check module.
 The ebook also holds task 3, "Weaving context in", for homework or the next lesson's do now.
 Sort the slips: correct → ready to move on; incorrect → start next lesson in the pre-teach group, with the read-along and the Support lane. Same destination next time.</a:t>
@@ -1605,7 +1605,7 @@
             <a:r>
               <a:rPr lang="en-US" dirty="0"/>
               <a:t>Do now — retrieval. Silent, no notes, no help: recall comes before any support. Give about four minutes.
-1. Which assessment objective rewards analysis of Priestley's methods, such as dramatic irony, stage directions and structure?  →  B   AO2
+1. Which assessment objective rewards analysis of Priestley's methods, such as dramatic irony, stage directions and structure?  →  D   AO2
 2. How many marks is the An Inspector Calls question worth, not counting the 4 marks for spelling, punctuation and grammar?  →  30 marks
 3. Unlike the Shakespeare question in Paper 1, the Paper 2 question on An Inspector Calls gives you no ___ from the play to read in the exam.  →  extract
 Circulate: who gets 3/3 (Stretch route), 2/3 (Core), 0–1 (Support)? Use this to route pupils later in the lesson.</a:t>
@@ -1697,7 +1697,7 @@
             <a:r>
               <a:rPr lang="en-US" dirty="0"/>
               <a:t>Answers — exit ticket: Exit ticket. Reveal the answer; pupils mark their own work in a different colour, then read the "why" together. Same destination for every lane, so one answer serves the whole class.
-Answer: A   AO2
+Answer: C   AO2
 Why: AO2 is analysis of language, form and structure, using subject terminology. Methods are AO2; context is AO3; argument and evidence are AO1; accuracy is AO4.
 Ask a Support pupil to explain one step, and a Stretch pupil to share their extension.</a:t>
             </a:r>
@@ -1788,7 +1788,7 @@
             <a:r>
               <a:rPr lang="en-US" dirty="0"/>
               <a:t>Answers — pupils mark their own in a different colour, then hands up for 3/3, 2/3, 1/3.
-1. B   AO2. AO2 is analysis of language, form and structure, using subject terminology. Methods are AO2; context is AO3; argument and evidence are AO1; accuracy is AO4.
+1. D   AO2. AO2 is analysis of language, form and structure, using subject terminology. Methods are AO2; context is AO3; argument and evidence are AO1; accuracy is AO4.
 2. 30 marks. 30 marks for your response, plus 4 for AO4, makes 34 marks for Section A of Paper 2.
 3. extract. Paper 2 Section A is closed book with no printed extract. You must know your quotations by heart, which is why your lessons build flashcards for every character.
 Say the route each score points to: 3/3 Stretch, 2/3 Core, 0–1 Support. Pupils may choose to move up.</a:t>
@@ -8348,7 +8348,7 @@
                 <a:ea typeface="Calibri" pitchFamily="34" charset="-122"/>
                 <a:cs typeface="Calibri" pitchFamily="34" charset="-120"/>
               </a:rPr>
-              <a:t>AO2</a:t>
+              <a:t>AO1</a:t>
             </a:r>
             <a:endParaRPr lang="en-US" sz="2400" dirty="0"/>
           </a:p>
@@ -8422,7 +8422,7 @@
                 <a:ea typeface="Calibri" pitchFamily="34" charset="-122"/>
                 <a:cs typeface="Calibri" pitchFamily="34" charset="-120"/>
               </a:rPr>
-              <a:t>AO4</a:t>
+              <a:t>AO2</a:t>
             </a:r>
             <a:endParaRPr lang="en-US" sz="2400" dirty="0"/>
           </a:p>
@@ -8459,7 +8459,7 @@
                 <a:ea typeface="Calibri" pitchFamily="34" charset="-122"/>
                 <a:cs typeface="Calibri" pitchFamily="34" charset="-120"/>
               </a:rPr>
-              <a:t>AO1</a:t>
+              <a:t>AO4</a:t>
             </a:r>
             <a:endParaRPr lang="en-US" sz="2400" dirty="0"/>
           </a:p>
@@ -10544,7 +10544,7 @@
                 <a:ea typeface="Calibri" pitchFamily="34" charset="-122"/>
                 <a:cs typeface="Calibri" pitchFamily="34" charset="-120"/>
               </a:rPr>
-              <a:t>AO1</a:t>
+              <a:t>AO4</a:t>
             </a:r>
             <a:endParaRPr lang="en-US" sz="1800" dirty="0"/>
           </a:p>
@@ -10581,7 +10581,7 @@
                 <a:ea typeface="Calibri" pitchFamily="34" charset="-122"/>
                 <a:cs typeface="Calibri" pitchFamily="34" charset="-120"/>
               </a:rPr>
-              <a:t>AO2</a:t>
+              <a:t>AO1</a:t>
             </a:r>
             <a:endParaRPr lang="en-US" sz="1800" dirty="0"/>
           </a:p>
@@ -10655,7 +10655,7 @@
                 <a:ea typeface="Calibri" pitchFamily="34" charset="-122"/>
                 <a:cs typeface="Calibri" pitchFamily="34" charset="-120"/>
               </a:rPr>
-              <a:t>AO4</a:t>
+              <a:t>AO2</a:t>
             </a:r>
             <a:endParaRPr lang="en-US" sz="1800" dirty="0"/>
           </a:p>
@@ -11390,7 +11390,7 @@
                 <a:ea typeface="Cambria" pitchFamily="34" charset="-122"/>
                 <a:cs typeface="Cambria" pitchFamily="34" charset="-120"/>
               </a:rPr>
-              <a:t>A   AO2</a:t>
+              <a:t>C   AO2</a:t>
             </a:r>
             <a:endParaRPr lang="en-US" sz="1800" dirty="0"/>
           </a:p>
@@ -11911,7 +11911,7 @@
                 <a:ea typeface="Calibri" pitchFamily="34" charset="-122"/>
                 <a:cs typeface="Calibri" pitchFamily="34" charset="-120"/>
               </a:rPr>
-              <a:t>B   AO2</a:t>
+              <a:t>D   AO2</a:t>
             </a:r>
             <a:endParaRPr lang="en-US" sz="2200" dirty="0"/>
           </a:p>

--- a/decks/englit-inspector/englit-inspector_ch6_themes-and-essay.pptx
+++ b/decks/englit-inspector/englit-inspector_ch6_themes-and-essay.pptx
@@ -126,29 +126,29 @@
   <p:extLst>
     <p:ext uri="{521415D9-36F7-43E2-AB2F-B90AF26B5E84}">
       <p14:sectionLst xmlns:p14="http://schemas.microsoft.com/office/powerpoint/2010/main">
-        <p14:section name="Opening" id="{2b346a98-2487-eb80-89fb-72d957d9a0d6}">
+        <p14:section name="Opening" id="{7175c3b4-3bd9-2d8b-177e-188fad68e2e5}">
           <p14:sldIdLst>
             <p14:sldId id="256"/>
           </p14:sldIdLst>
         </p14:section>
-        <p14:section name="Gate" id="{442fb349-302b-a8cb-de0c-d4382f5c4a66}">
+        <p14:section name="Gate" id="{a6b1f9fe-f3d6-7361-1df5-6725cb421265}">
           <p14:sldIdLst>
             <p14:sldId id="257"/>
             <p14:sldId id="258"/>
           </p14:sldIdLst>
         </p14:section>
-        <p14:section name="Pre-teach" id="{823fc006-d5a2-43dc-b4ad-5deea56a5157}">
+        <p14:section name="Pre-teach" id="{5d042623-3240-efee-4667-c7e1826337aa}">
           <p14:sldIdLst>
             <p14:sldId id="259"/>
           </p14:sldIdLst>
         </p14:section>
-        <p14:section name="Read-along" id="{99a1bc54-b4d0-5dfa-a3cc-4884b1e4a92c}">
+        <p14:section name="Read-along" id="{882c0e2e-f167-7bc8-652c-6ecf1dda633b}">
           <p14:sldIdLst>
             <p14:sldId id="260"/>
             <p14:sldId id="261"/>
           </p14:sldIdLst>
         </p14:section>
-        <p14:section name="Teach" id="{e3a6b49f-2a6d-6368-9da7-4259305d4008}">
+        <p14:section name="Teach" id="{63e72c13-70ed-3ecf-f10d-366edbd95d1e}">
           <p14:sldIdLst>
             <p14:sldId id="262"/>
             <p14:sldId id="263"/>
@@ -156,7 +156,7 @@
             <p14:sldId id="265"/>
           </p14:sldIdLst>
         </p14:section>
-        <p14:section name="Routes" id="{3811ce51-8113-8dc5-9731-4abc7654f8aa}">
+        <p14:section name="Routes" id="{6cc80f3f-b865-242c-f5b4-3676c322faec}">
           <p14:sldIdLst>
             <p14:sldId id="266"/>
             <p14:sldId id="267"/>
@@ -165,12 +165,12 @@
             <p14:sldId id="270"/>
           </p14:sldIdLst>
         </p14:section>
-        <p14:section name="Close" id="{afcc2714-3578-47c7-6f28-121ceb3bbb8d}">
+        <p14:section name="Close" id="{eadae492-2cbb-2260-9a6d-1987990a57c7}">
           <p14:sldIdLst>
             <p14:sldId id="271"/>
           </p14:sldIdLst>
         </p14:section>
-        <p14:section name="Answers" id="{51697bc0-7d3f-0063-42e4-ee0ad3ead6d1}">
+        <p14:section name="Answers" id="{afcfd05d-7136-aaa7-f003-eb3b01a277be}">
           <p14:sldIdLst>
             <p14:sldId id="272"/>
             <p14:sldId id="273"/>
